--- a/public/fun/pack/pptx/news/카드뉴스_18_계절안부_바닷가등대.pptx
+++ b/public/fun/pack/pptx/news/카드뉴스_18_계절안부_바닷가등대.pptx
@@ -3287,14 +3287,6 @@
 <file path=ppt/slides/slide1.xml><?xml version="1.0" encoding="utf-8"?>
 <p:sld xmlns:a="http://schemas.openxmlformats.org/drawingml/2006/main" xmlns:p="http://schemas.openxmlformats.org/presentationml/2006/main" xmlns:r="http://schemas.openxmlformats.org/officeDocument/2006/relationships">
   <p:cSld>
-    <p:bg>
-      <p:bgPr>
-        <a:solidFill>
-          <a:srgbClr val="FFFFFF"/>
-        </a:solidFill>
-        <a:effectLst/>
-      </p:bgPr>
-    </p:bg>
     <p:spTree>
       <p:nvGrpSpPr>
         <p:cNvPr id="1" name=""/>
@@ -3302,151 +3294,30 @@
         <p:nvPr/>
       </p:nvGrpSpPr>
       <p:grpSpPr/>
-      <p:sp>
-        <p:nvSpPr>
-          <p:cNvPr id="3" name="장식"/>
-          <p:cNvSpPr/>
+      <p:pic>
+        <p:nvPicPr>
+          <p:cNvPr id="3" name="표지 그림" descr="news-18.jpg"/>
+          <p:cNvPicPr>
+            <a:picLocks noChangeAspect="1"/>
+          </p:cNvPicPr>
           <p:nvPr/>
-        </p:nvSpPr>
-        <p:spPr>
-          <a:xfrm>
-            <a:off x="0" y="2057400"/>
-            <a:ext cx="5760720" cy="1828800"/>
-          </a:xfrm>
-          <a:prstGeom prst="homePlate">
-            <a:avLst/>
-          </a:prstGeom>
-          <a:solidFill>
-            <a:srgbClr val="25799D"/>
-          </a:solidFill>
-          <a:ln>
-            <a:noFill/>
-          </a:ln>
-        </p:spPr>
-        <p:txBody>
-          <a:bodyPr rtlCol="0" anchor="ctr"/>
-          <a:lstStyle/>
-          <a:p>
-            <a:pPr algn="ctr"/>
-          </a:p>
-        </p:txBody>
-      </p:sp>
-      <p:sp>
-        <p:nvSpPr>
-          <p:cNvPr id="4" name="장식"/>
-          <p:cNvSpPr/>
-          <p:nvPr/>
-        </p:nvSpPr>
-        <p:spPr>
-          <a:xfrm>
-            <a:off x="0" y="3886200"/>
-            <a:ext cx="5349240" cy="64008"/>
+        </p:nvPicPr>
+        <p:blipFill>
+          <a:blip r:embed="rId2"/>
+          <a:stretch>
+            <a:fillRect/>
+          </a:stretch>
+        </p:blipFill>
+        <p:spPr>
+          <a:xfrm>
+            <a:off x="0" y="0"/>
+            <a:ext cx="6858000" cy="6858000"/>
           </a:xfrm>
           <a:prstGeom prst="rect">
             <a:avLst/>
           </a:prstGeom>
-          <a:solidFill>
-            <a:srgbClr val="913B4C"/>
-          </a:solidFill>
-          <a:ln>
-            <a:noFill/>
-          </a:ln>
-        </p:spPr>
-        <p:txBody>
-          <a:bodyPr rtlCol="0" anchor="ctr"/>
-          <a:lstStyle/>
-          <a:p>
-            <a:pPr algn="ctr"/>
-          </a:p>
-        </p:txBody>
-      </p:sp>
-      <p:sp>
-        <p:nvSpPr>
-          <p:cNvPr id="5" name="장식"/>
-          <p:cNvSpPr/>
-          <p:nvPr/>
-        </p:nvSpPr>
-        <p:spPr>
-          <a:xfrm>
-            <a:off x="4636007" y="672084"/>
-            <a:ext cx="2798064" cy="699516"/>
-          </a:xfrm>
-          <a:prstGeom prst="wave">
-            <a:avLst/>
-          </a:prstGeom>
-          <a:solidFill>
-            <a:srgbClr val="CCE9F5"/>
-          </a:solidFill>
-          <a:ln>
-            <a:noFill/>
-          </a:ln>
-        </p:spPr>
-        <p:txBody>
-          <a:bodyPr rtlCol="0" anchor="ctr"/>
-          <a:lstStyle/>
-          <a:p>
-            <a:pPr algn="ctr"/>
-          </a:p>
-        </p:txBody>
-      </p:sp>
-      <p:sp>
-        <p:nvSpPr>
-          <p:cNvPr id="6" name="장식"/>
-          <p:cNvSpPr/>
-          <p:nvPr/>
-        </p:nvSpPr>
-        <p:spPr>
-          <a:xfrm>
-            <a:off x="4636007" y="1278331"/>
-            <a:ext cx="2798064" cy="699516"/>
-          </a:xfrm>
-          <a:prstGeom prst="wave">
-            <a:avLst/>
-          </a:prstGeom>
-          <a:solidFill>
-            <a:srgbClr val="25799D"/>
-          </a:solidFill>
-          <a:ln>
-            <a:noFill/>
-          </a:ln>
-        </p:spPr>
-        <p:txBody>
-          <a:bodyPr rtlCol="0" anchor="ctr"/>
-          <a:lstStyle/>
-          <a:p>
-            <a:pPr algn="ctr"/>
-          </a:p>
-        </p:txBody>
-      </p:sp>
-      <p:sp>
-        <p:nvSpPr>
-          <p:cNvPr id="7" name="장식"/>
-          <p:cNvSpPr/>
-          <p:nvPr/>
-        </p:nvSpPr>
-        <p:spPr>
-          <a:xfrm>
-            <a:off x="4636007" y="1884578"/>
-            <a:ext cx="2798064" cy="699516"/>
-          </a:xfrm>
-          <a:prstGeom prst="wave">
-            <a:avLst/>
-          </a:prstGeom>
-          <a:solidFill>
-            <a:srgbClr val="913B4C"/>
-          </a:solidFill>
-          <a:ln>
-            <a:noFill/>
-          </a:ln>
-        </p:spPr>
-        <p:txBody>
-          <a:bodyPr rtlCol="0" anchor="ctr"/>
-          <a:lstStyle/>
-          <a:p>
-            <a:pPr algn="ctr"/>
-          </a:p>
-        </p:txBody>
-      </p:sp>
+        </p:spPr>
+      </p:pic>
       <p:sp>
         <p:nvSpPr>
           <p:cNvPr id="2" name="Title 1"/>
@@ -3459,8 +3330,8 @@
         </p:nvSpPr>
         <p:spPr>
           <a:xfrm>
-            <a:off x="411479" y="2167128"/>
-            <a:ext cx="4937759" cy="1609344"/>
+            <a:off x="685800" y="960120"/>
+            <a:ext cx="5486400" cy="1463040"/>
           </a:xfrm>
         </p:spPr>
         <p:txBody>
@@ -3477,24 +3348,24 @@
             <a:r>
               <a:rPr sz="3000" b="1" i="0">
                 <a:solidFill>
-                  <a:srgbClr val="FFFFFF"/>
+                  <a:srgbClr val="11394A"/>
                 </a:solidFill>
               </a:rPr>
-              <a:t>등대 같은 사람이 되어 주세요</a:t>
-            </a:r>
-          </a:p>
-        </p:txBody>
-      </p:sp>
-      <p:sp>
-        <p:nvSpPr>
-          <p:cNvPr id="8" name="한 줄 문구"/>
+              <a:t>장마철 빨래 잘 말리는 법</a:t>
+            </a:r>
+          </a:p>
+        </p:txBody>
+      </p:sp>
+      <p:sp>
+        <p:nvSpPr>
+          <p:cNvPr id="4" name="한 줄 문구"/>
           <p:cNvSpPr txBox="1"/>
           <p:nvPr/>
         </p:nvSpPr>
         <p:spPr>
           <a:xfrm>
-            <a:off x="411479" y="4160520"/>
-            <a:ext cx="4800600" cy="822960"/>
+            <a:off x="685800" y="2560320"/>
+            <a:ext cx="5486400" cy="822960"/>
           </a:xfrm>
           <a:prstGeom prst="rect">
             <a:avLst/>
@@ -3525,14 +3396,14 @@
       </p:sp>
       <p:sp>
         <p:nvSpPr>
-          <p:cNvPr id="9" name="안내 문구"/>
+          <p:cNvPr id="5" name="안내 문구"/>
           <p:cNvSpPr txBox="1"/>
           <p:nvPr/>
         </p:nvSpPr>
         <p:spPr>
           <a:xfrm>
-            <a:off x="411479" y="5029200"/>
-            <a:ext cx="4800600" cy="914400"/>
+            <a:off x="685800" y="3429000"/>
+            <a:ext cx="5486400" cy="914400"/>
           </a:xfrm>
           <a:prstGeom prst="rect">
             <a:avLst/>
@@ -3618,93 +3489,6 @@
       </p:sp>
       <p:sp>
         <p:nvSpPr>
-          <p:cNvPr id="4" name="장식"/>
-          <p:cNvSpPr/>
-          <p:nvPr/>
-        </p:nvSpPr>
-        <p:spPr>
-          <a:xfrm>
-            <a:off x="5385816" y="475488"/>
-            <a:ext cx="1207008" cy="301752"/>
-          </a:xfrm>
-          <a:prstGeom prst="wave">
-            <a:avLst/>
-          </a:prstGeom>
-          <a:solidFill>
-            <a:srgbClr val="CCE9F5"/>
-          </a:solidFill>
-          <a:ln>
-            <a:noFill/>
-          </a:ln>
-        </p:spPr>
-        <p:txBody>
-          <a:bodyPr rtlCol="0" anchor="ctr"/>
-          <a:lstStyle/>
-          <a:p>
-            <a:pPr algn="ctr"/>
-          </a:p>
-        </p:txBody>
-      </p:sp>
-      <p:sp>
-        <p:nvSpPr>
-          <p:cNvPr id="5" name="장식"/>
-          <p:cNvSpPr/>
-          <p:nvPr/>
-        </p:nvSpPr>
-        <p:spPr>
-          <a:xfrm>
-            <a:off x="5385816" y="737006"/>
-            <a:ext cx="1207008" cy="301752"/>
-          </a:xfrm>
-          <a:prstGeom prst="wave">
-            <a:avLst/>
-          </a:prstGeom>
-          <a:solidFill>
-            <a:srgbClr val="25799D"/>
-          </a:solidFill>
-          <a:ln>
-            <a:noFill/>
-          </a:ln>
-        </p:spPr>
-        <p:txBody>
-          <a:bodyPr rtlCol="0" anchor="ctr"/>
-          <a:lstStyle/>
-          <a:p>
-            <a:pPr algn="ctr"/>
-          </a:p>
-        </p:txBody>
-      </p:sp>
-      <p:sp>
-        <p:nvSpPr>
-          <p:cNvPr id="6" name="장식"/>
-          <p:cNvSpPr/>
-          <p:nvPr/>
-        </p:nvSpPr>
-        <p:spPr>
-          <a:xfrm>
-            <a:off x="5385816" y="998524"/>
-            <a:ext cx="1207008" cy="301752"/>
-          </a:xfrm>
-          <a:prstGeom prst="wave">
-            <a:avLst/>
-          </a:prstGeom>
-          <a:solidFill>
-            <a:srgbClr val="913B4C"/>
-          </a:solidFill>
-          <a:ln>
-            <a:noFill/>
-          </a:ln>
-        </p:spPr>
-        <p:txBody>
-          <a:bodyPr rtlCol="0" anchor="ctr"/>
-          <a:lstStyle/>
-          <a:p>
-            <a:pPr algn="ctr"/>
-          </a:p>
-        </p:txBody>
-      </p:sp>
-      <p:sp>
-        <p:nvSpPr>
           <p:cNvPr id="2" name="Title 1"/>
           <p:cNvSpPr>
             <a:spLocks noGrp="1"/>
@@ -3743,7 +3527,7 @@
       </p:sp>
       <p:sp>
         <p:nvSpPr>
-          <p:cNvPr id="7" name="번호"/>
+          <p:cNvPr id="4" name="번호"/>
           <p:cNvSpPr txBox="1"/>
           <p:nvPr/>
         </p:nvSpPr>
@@ -3781,7 +3565,7 @@
       </p:sp>
       <p:sp>
         <p:nvSpPr>
-          <p:cNvPr id="8" name="본문"/>
+          <p:cNvPr id="5" name="본문"/>
           <p:cNvSpPr txBox="1"/>
           <p:nvPr/>
         </p:nvSpPr>
@@ -3819,7 +3603,7 @@
       </p:sp>
       <p:sp>
         <p:nvSpPr>
-          <p:cNvPr id="9" name="쪽 번호"/>
+          <p:cNvPr id="6" name="쪽 번호"/>
           <p:cNvSpPr txBox="1"/>
           <p:nvPr/>
         </p:nvSpPr>
@@ -3912,93 +3696,6 @@
       </p:sp>
       <p:sp>
         <p:nvSpPr>
-          <p:cNvPr id="4" name="장식"/>
-          <p:cNvSpPr/>
-          <p:nvPr/>
-        </p:nvSpPr>
-        <p:spPr>
-          <a:xfrm>
-            <a:off x="5385816" y="475488"/>
-            <a:ext cx="1207008" cy="301752"/>
-          </a:xfrm>
-          <a:prstGeom prst="wave">
-            <a:avLst/>
-          </a:prstGeom>
-          <a:solidFill>
-            <a:srgbClr val="CCE9F5"/>
-          </a:solidFill>
-          <a:ln>
-            <a:noFill/>
-          </a:ln>
-        </p:spPr>
-        <p:txBody>
-          <a:bodyPr rtlCol="0" anchor="ctr"/>
-          <a:lstStyle/>
-          <a:p>
-            <a:pPr algn="ctr"/>
-          </a:p>
-        </p:txBody>
-      </p:sp>
-      <p:sp>
-        <p:nvSpPr>
-          <p:cNvPr id="5" name="장식"/>
-          <p:cNvSpPr/>
-          <p:nvPr/>
-        </p:nvSpPr>
-        <p:spPr>
-          <a:xfrm>
-            <a:off x="5385816" y="737006"/>
-            <a:ext cx="1207008" cy="301752"/>
-          </a:xfrm>
-          <a:prstGeom prst="wave">
-            <a:avLst/>
-          </a:prstGeom>
-          <a:solidFill>
-            <a:srgbClr val="25799D"/>
-          </a:solidFill>
-          <a:ln>
-            <a:noFill/>
-          </a:ln>
-        </p:spPr>
-        <p:txBody>
-          <a:bodyPr rtlCol="0" anchor="ctr"/>
-          <a:lstStyle/>
-          <a:p>
-            <a:pPr algn="ctr"/>
-          </a:p>
-        </p:txBody>
-      </p:sp>
-      <p:sp>
-        <p:nvSpPr>
-          <p:cNvPr id="6" name="장식"/>
-          <p:cNvSpPr/>
-          <p:nvPr/>
-        </p:nvSpPr>
-        <p:spPr>
-          <a:xfrm>
-            <a:off x="5385816" y="998524"/>
-            <a:ext cx="1207008" cy="301752"/>
-          </a:xfrm>
-          <a:prstGeom prst="wave">
-            <a:avLst/>
-          </a:prstGeom>
-          <a:solidFill>
-            <a:srgbClr val="913B4C"/>
-          </a:solidFill>
-          <a:ln>
-            <a:noFill/>
-          </a:ln>
-        </p:spPr>
-        <p:txBody>
-          <a:bodyPr rtlCol="0" anchor="ctr"/>
-          <a:lstStyle/>
-          <a:p>
-            <a:pPr algn="ctr"/>
-          </a:p>
-        </p:txBody>
-      </p:sp>
-      <p:sp>
-        <p:nvSpPr>
           <p:cNvPr id="2" name="Title 1"/>
           <p:cNvSpPr>
             <a:spLocks noGrp="1"/>
@@ -4037,7 +3734,7 @@
       </p:sp>
       <p:sp>
         <p:nvSpPr>
-          <p:cNvPr id="7" name="번호"/>
+          <p:cNvPr id="4" name="번호"/>
           <p:cNvSpPr txBox="1"/>
           <p:nvPr/>
         </p:nvSpPr>
@@ -4075,7 +3772,7 @@
       </p:sp>
       <p:sp>
         <p:nvSpPr>
-          <p:cNvPr id="8" name="본문"/>
+          <p:cNvPr id="5" name="본문"/>
           <p:cNvSpPr txBox="1"/>
           <p:nvPr/>
         </p:nvSpPr>
@@ -4113,7 +3810,7 @@
       </p:sp>
       <p:sp>
         <p:nvSpPr>
-          <p:cNvPr id="9" name="쪽 번호"/>
+          <p:cNvPr id="6" name="쪽 번호"/>
           <p:cNvSpPr txBox="1"/>
           <p:nvPr/>
         </p:nvSpPr>
@@ -4206,93 +3903,6 @@
       </p:sp>
       <p:sp>
         <p:nvSpPr>
-          <p:cNvPr id="4" name="장식"/>
-          <p:cNvSpPr/>
-          <p:nvPr/>
-        </p:nvSpPr>
-        <p:spPr>
-          <a:xfrm>
-            <a:off x="5385816" y="475488"/>
-            <a:ext cx="1207008" cy="301752"/>
-          </a:xfrm>
-          <a:prstGeom prst="wave">
-            <a:avLst/>
-          </a:prstGeom>
-          <a:solidFill>
-            <a:srgbClr val="CCE9F5"/>
-          </a:solidFill>
-          <a:ln>
-            <a:noFill/>
-          </a:ln>
-        </p:spPr>
-        <p:txBody>
-          <a:bodyPr rtlCol="0" anchor="ctr"/>
-          <a:lstStyle/>
-          <a:p>
-            <a:pPr algn="ctr"/>
-          </a:p>
-        </p:txBody>
-      </p:sp>
-      <p:sp>
-        <p:nvSpPr>
-          <p:cNvPr id="5" name="장식"/>
-          <p:cNvSpPr/>
-          <p:nvPr/>
-        </p:nvSpPr>
-        <p:spPr>
-          <a:xfrm>
-            <a:off x="5385816" y="737006"/>
-            <a:ext cx="1207008" cy="301752"/>
-          </a:xfrm>
-          <a:prstGeom prst="wave">
-            <a:avLst/>
-          </a:prstGeom>
-          <a:solidFill>
-            <a:srgbClr val="25799D"/>
-          </a:solidFill>
-          <a:ln>
-            <a:noFill/>
-          </a:ln>
-        </p:spPr>
-        <p:txBody>
-          <a:bodyPr rtlCol="0" anchor="ctr"/>
-          <a:lstStyle/>
-          <a:p>
-            <a:pPr algn="ctr"/>
-          </a:p>
-        </p:txBody>
-      </p:sp>
-      <p:sp>
-        <p:nvSpPr>
-          <p:cNvPr id="6" name="장식"/>
-          <p:cNvSpPr/>
-          <p:nvPr/>
-        </p:nvSpPr>
-        <p:spPr>
-          <a:xfrm>
-            <a:off x="5385816" y="998524"/>
-            <a:ext cx="1207008" cy="301752"/>
-          </a:xfrm>
-          <a:prstGeom prst="wave">
-            <a:avLst/>
-          </a:prstGeom>
-          <a:solidFill>
-            <a:srgbClr val="913B4C"/>
-          </a:solidFill>
-          <a:ln>
-            <a:noFill/>
-          </a:ln>
-        </p:spPr>
-        <p:txBody>
-          <a:bodyPr rtlCol="0" anchor="ctr"/>
-          <a:lstStyle/>
-          <a:p>
-            <a:pPr algn="ctr"/>
-          </a:p>
-        </p:txBody>
-      </p:sp>
-      <p:sp>
-        <p:nvSpPr>
           <p:cNvPr id="2" name="Title 1"/>
           <p:cNvSpPr>
             <a:spLocks noGrp="1"/>
@@ -4331,7 +3941,7 @@
       </p:sp>
       <p:sp>
         <p:nvSpPr>
-          <p:cNvPr id="7" name="번호"/>
+          <p:cNvPr id="4" name="번호"/>
           <p:cNvSpPr txBox="1"/>
           <p:nvPr/>
         </p:nvSpPr>
@@ -4369,7 +3979,7 @@
       </p:sp>
       <p:sp>
         <p:nvSpPr>
-          <p:cNvPr id="8" name="본문"/>
+          <p:cNvPr id="5" name="본문"/>
           <p:cNvSpPr txBox="1"/>
           <p:nvPr/>
         </p:nvSpPr>
@@ -4407,7 +4017,7 @@
       </p:sp>
       <p:sp>
         <p:nvSpPr>
-          <p:cNvPr id="9" name="쪽 번호"/>
+          <p:cNvPr id="6" name="쪽 번호"/>
           <p:cNvSpPr txBox="1"/>
           <p:nvPr/>
         </p:nvSpPr>
@@ -4500,93 +4110,6 @@
       </p:sp>
       <p:sp>
         <p:nvSpPr>
-          <p:cNvPr id="4" name="장식"/>
-          <p:cNvSpPr/>
-          <p:nvPr/>
-        </p:nvSpPr>
-        <p:spPr>
-          <a:xfrm>
-            <a:off x="5385816" y="475488"/>
-            <a:ext cx="1207008" cy="301752"/>
-          </a:xfrm>
-          <a:prstGeom prst="wave">
-            <a:avLst/>
-          </a:prstGeom>
-          <a:solidFill>
-            <a:srgbClr val="CCE9F5"/>
-          </a:solidFill>
-          <a:ln>
-            <a:noFill/>
-          </a:ln>
-        </p:spPr>
-        <p:txBody>
-          <a:bodyPr rtlCol="0" anchor="ctr"/>
-          <a:lstStyle/>
-          <a:p>
-            <a:pPr algn="ctr"/>
-          </a:p>
-        </p:txBody>
-      </p:sp>
-      <p:sp>
-        <p:nvSpPr>
-          <p:cNvPr id="5" name="장식"/>
-          <p:cNvSpPr/>
-          <p:nvPr/>
-        </p:nvSpPr>
-        <p:spPr>
-          <a:xfrm>
-            <a:off x="5385816" y="737006"/>
-            <a:ext cx="1207008" cy="301752"/>
-          </a:xfrm>
-          <a:prstGeom prst="wave">
-            <a:avLst/>
-          </a:prstGeom>
-          <a:solidFill>
-            <a:srgbClr val="25799D"/>
-          </a:solidFill>
-          <a:ln>
-            <a:noFill/>
-          </a:ln>
-        </p:spPr>
-        <p:txBody>
-          <a:bodyPr rtlCol="0" anchor="ctr"/>
-          <a:lstStyle/>
-          <a:p>
-            <a:pPr algn="ctr"/>
-          </a:p>
-        </p:txBody>
-      </p:sp>
-      <p:sp>
-        <p:nvSpPr>
-          <p:cNvPr id="6" name="장식"/>
-          <p:cNvSpPr/>
-          <p:nvPr/>
-        </p:nvSpPr>
-        <p:spPr>
-          <a:xfrm>
-            <a:off x="5385816" y="998524"/>
-            <a:ext cx="1207008" cy="301752"/>
-          </a:xfrm>
-          <a:prstGeom prst="wave">
-            <a:avLst/>
-          </a:prstGeom>
-          <a:solidFill>
-            <a:srgbClr val="913B4C"/>
-          </a:solidFill>
-          <a:ln>
-            <a:noFill/>
-          </a:ln>
-        </p:spPr>
-        <p:txBody>
-          <a:bodyPr rtlCol="0" anchor="ctr"/>
-          <a:lstStyle/>
-          <a:p>
-            <a:pPr algn="ctr"/>
-          </a:p>
-        </p:txBody>
-      </p:sp>
-      <p:sp>
-        <p:nvSpPr>
           <p:cNvPr id="2" name="Title 1"/>
           <p:cNvSpPr>
             <a:spLocks noGrp="1"/>
@@ -4625,7 +4148,7 @@
       </p:sp>
       <p:sp>
         <p:nvSpPr>
-          <p:cNvPr id="7" name="번호"/>
+          <p:cNvPr id="4" name="번호"/>
           <p:cNvSpPr txBox="1"/>
           <p:nvPr/>
         </p:nvSpPr>
@@ -4663,7 +4186,7 @@
       </p:sp>
       <p:sp>
         <p:nvSpPr>
-          <p:cNvPr id="8" name="본문"/>
+          <p:cNvPr id="5" name="본문"/>
           <p:cNvSpPr txBox="1"/>
           <p:nvPr/>
         </p:nvSpPr>
@@ -4701,7 +4224,7 @@
       </p:sp>
       <p:sp>
         <p:nvSpPr>
-          <p:cNvPr id="9" name="쪽 번호"/>
+          <p:cNvPr id="6" name="쪽 번호"/>
           <p:cNvSpPr txBox="1"/>
           <p:nvPr/>
         </p:nvSpPr>
@@ -4794,93 +4317,6 @@
       </p:sp>
       <p:sp>
         <p:nvSpPr>
-          <p:cNvPr id="4" name="장식"/>
-          <p:cNvSpPr/>
-          <p:nvPr/>
-        </p:nvSpPr>
-        <p:spPr>
-          <a:xfrm>
-            <a:off x="5385816" y="475488"/>
-            <a:ext cx="1207008" cy="301752"/>
-          </a:xfrm>
-          <a:prstGeom prst="wave">
-            <a:avLst/>
-          </a:prstGeom>
-          <a:solidFill>
-            <a:srgbClr val="CCE9F5"/>
-          </a:solidFill>
-          <a:ln>
-            <a:noFill/>
-          </a:ln>
-        </p:spPr>
-        <p:txBody>
-          <a:bodyPr rtlCol="0" anchor="ctr"/>
-          <a:lstStyle/>
-          <a:p>
-            <a:pPr algn="ctr"/>
-          </a:p>
-        </p:txBody>
-      </p:sp>
-      <p:sp>
-        <p:nvSpPr>
-          <p:cNvPr id="5" name="장식"/>
-          <p:cNvSpPr/>
-          <p:nvPr/>
-        </p:nvSpPr>
-        <p:spPr>
-          <a:xfrm>
-            <a:off x="5385816" y="737006"/>
-            <a:ext cx="1207008" cy="301752"/>
-          </a:xfrm>
-          <a:prstGeom prst="wave">
-            <a:avLst/>
-          </a:prstGeom>
-          <a:solidFill>
-            <a:srgbClr val="25799D"/>
-          </a:solidFill>
-          <a:ln>
-            <a:noFill/>
-          </a:ln>
-        </p:spPr>
-        <p:txBody>
-          <a:bodyPr rtlCol="0" anchor="ctr"/>
-          <a:lstStyle/>
-          <a:p>
-            <a:pPr algn="ctr"/>
-          </a:p>
-        </p:txBody>
-      </p:sp>
-      <p:sp>
-        <p:nvSpPr>
-          <p:cNvPr id="6" name="장식"/>
-          <p:cNvSpPr/>
-          <p:nvPr/>
-        </p:nvSpPr>
-        <p:spPr>
-          <a:xfrm>
-            <a:off x="5385816" y="998524"/>
-            <a:ext cx="1207008" cy="301752"/>
-          </a:xfrm>
-          <a:prstGeom prst="wave">
-            <a:avLst/>
-          </a:prstGeom>
-          <a:solidFill>
-            <a:srgbClr val="913B4C"/>
-          </a:solidFill>
-          <a:ln>
-            <a:noFill/>
-          </a:ln>
-        </p:spPr>
-        <p:txBody>
-          <a:bodyPr rtlCol="0" anchor="ctr"/>
-          <a:lstStyle/>
-          <a:p>
-            <a:pPr algn="ctr"/>
-          </a:p>
-        </p:txBody>
-      </p:sp>
-      <p:sp>
-        <p:nvSpPr>
           <p:cNvPr id="2" name="Title 1"/>
           <p:cNvSpPr>
             <a:spLocks noGrp="1"/>
@@ -4919,7 +4355,7 @@
       </p:sp>
       <p:sp>
         <p:nvSpPr>
-          <p:cNvPr id="7" name="번호"/>
+          <p:cNvPr id="4" name="번호"/>
           <p:cNvSpPr txBox="1"/>
           <p:nvPr/>
         </p:nvSpPr>
@@ -4957,7 +4393,7 @@
       </p:sp>
       <p:sp>
         <p:nvSpPr>
-          <p:cNvPr id="8" name="본문"/>
+          <p:cNvPr id="5" name="본문"/>
           <p:cNvSpPr txBox="1"/>
           <p:nvPr/>
         </p:nvSpPr>
@@ -4995,7 +4431,7 @@
       </p:sp>
       <p:sp>
         <p:nvSpPr>
-          <p:cNvPr id="9" name="쪽 번호"/>
+          <p:cNvPr id="6" name="쪽 번호"/>
           <p:cNvSpPr txBox="1"/>
           <p:nvPr/>
         </p:nvSpPr>
@@ -5042,14 +4478,6 @@
 <file path=ppt/slides/slide7.xml><?xml version="1.0" encoding="utf-8"?>
 <p:sld xmlns:a="http://schemas.openxmlformats.org/drawingml/2006/main" xmlns:p="http://schemas.openxmlformats.org/presentationml/2006/main" xmlns:r="http://schemas.openxmlformats.org/officeDocument/2006/relationships">
   <p:cSld>
-    <p:bg>
-      <p:bgPr>
-        <a:solidFill>
-          <a:srgbClr val="FFFFFF"/>
-        </a:solidFill>
-        <a:effectLst/>
-      </p:bgPr>
-    </p:bg>
     <p:spTree>
       <p:nvGrpSpPr>
         <p:cNvPr id="1" name=""/>
@@ -5057,151 +4485,30 @@
         <p:nvPr/>
       </p:nvGrpSpPr>
       <p:grpSpPr/>
-      <p:sp>
-        <p:nvSpPr>
-          <p:cNvPr id="3" name="장식"/>
-          <p:cNvSpPr/>
+      <p:pic>
+        <p:nvPicPr>
+          <p:cNvPr id="3" name="표지 그림" descr="news-18.jpg"/>
+          <p:cNvPicPr>
+            <a:picLocks noChangeAspect="1"/>
+          </p:cNvPicPr>
           <p:nvPr/>
-        </p:nvSpPr>
-        <p:spPr>
-          <a:xfrm>
-            <a:off x="0" y="2057400"/>
-            <a:ext cx="5760720" cy="1828800"/>
-          </a:xfrm>
-          <a:prstGeom prst="homePlate">
-            <a:avLst/>
-          </a:prstGeom>
-          <a:solidFill>
-            <a:srgbClr val="25799D"/>
-          </a:solidFill>
-          <a:ln>
-            <a:noFill/>
-          </a:ln>
-        </p:spPr>
-        <p:txBody>
-          <a:bodyPr rtlCol="0" anchor="ctr"/>
-          <a:lstStyle/>
-          <a:p>
-            <a:pPr algn="ctr"/>
-          </a:p>
-        </p:txBody>
-      </p:sp>
-      <p:sp>
-        <p:nvSpPr>
-          <p:cNvPr id="4" name="장식"/>
-          <p:cNvSpPr/>
-          <p:nvPr/>
-        </p:nvSpPr>
-        <p:spPr>
-          <a:xfrm>
-            <a:off x="0" y="3886200"/>
-            <a:ext cx="5349240" cy="64008"/>
+        </p:nvPicPr>
+        <p:blipFill>
+          <a:blip r:embed="rId2"/>
+          <a:stretch>
+            <a:fillRect/>
+          </a:stretch>
+        </p:blipFill>
+        <p:spPr>
+          <a:xfrm>
+            <a:off x="0" y="0"/>
+            <a:ext cx="6858000" cy="6858000"/>
           </a:xfrm>
           <a:prstGeom prst="rect">
             <a:avLst/>
           </a:prstGeom>
-          <a:solidFill>
-            <a:srgbClr val="913B4C"/>
-          </a:solidFill>
-          <a:ln>
-            <a:noFill/>
-          </a:ln>
-        </p:spPr>
-        <p:txBody>
-          <a:bodyPr rtlCol="0" anchor="ctr"/>
-          <a:lstStyle/>
-          <a:p>
-            <a:pPr algn="ctr"/>
-          </a:p>
-        </p:txBody>
-      </p:sp>
-      <p:sp>
-        <p:nvSpPr>
-          <p:cNvPr id="5" name="장식"/>
-          <p:cNvSpPr/>
-          <p:nvPr/>
-        </p:nvSpPr>
-        <p:spPr>
-          <a:xfrm>
-            <a:off x="4636007" y="672084"/>
-            <a:ext cx="2798064" cy="699516"/>
-          </a:xfrm>
-          <a:prstGeom prst="wave">
-            <a:avLst/>
-          </a:prstGeom>
-          <a:solidFill>
-            <a:srgbClr val="CCE9F5"/>
-          </a:solidFill>
-          <a:ln>
-            <a:noFill/>
-          </a:ln>
-        </p:spPr>
-        <p:txBody>
-          <a:bodyPr rtlCol="0" anchor="ctr"/>
-          <a:lstStyle/>
-          <a:p>
-            <a:pPr algn="ctr"/>
-          </a:p>
-        </p:txBody>
-      </p:sp>
-      <p:sp>
-        <p:nvSpPr>
-          <p:cNvPr id="6" name="장식"/>
-          <p:cNvSpPr/>
-          <p:nvPr/>
-        </p:nvSpPr>
-        <p:spPr>
-          <a:xfrm>
-            <a:off x="4636007" y="1278331"/>
-            <a:ext cx="2798064" cy="699516"/>
-          </a:xfrm>
-          <a:prstGeom prst="wave">
-            <a:avLst/>
-          </a:prstGeom>
-          <a:solidFill>
-            <a:srgbClr val="25799D"/>
-          </a:solidFill>
-          <a:ln>
-            <a:noFill/>
-          </a:ln>
-        </p:spPr>
-        <p:txBody>
-          <a:bodyPr rtlCol="0" anchor="ctr"/>
-          <a:lstStyle/>
-          <a:p>
-            <a:pPr algn="ctr"/>
-          </a:p>
-        </p:txBody>
-      </p:sp>
-      <p:sp>
-        <p:nvSpPr>
-          <p:cNvPr id="7" name="장식"/>
-          <p:cNvSpPr/>
-          <p:nvPr/>
-        </p:nvSpPr>
-        <p:spPr>
-          <a:xfrm>
-            <a:off x="4636007" y="1884578"/>
-            <a:ext cx="2798064" cy="699516"/>
-          </a:xfrm>
-          <a:prstGeom prst="wave">
-            <a:avLst/>
-          </a:prstGeom>
-          <a:solidFill>
-            <a:srgbClr val="913B4C"/>
-          </a:solidFill>
-          <a:ln>
-            <a:noFill/>
-          </a:ln>
-        </p:spPr>
-        <p:txBody>
-          <a:bodyPr rtlCol="0" anchor="ctr"/>
-          <a:lstStyle/>
-          <a:p>
-            <a:pPr algn="ctr"/>
-          </a:p>
-        </p:txBody>
-      </p:sp>
+        </p:spPr>
+      </p:pic>
       <p:sp>
         <p:nvSpPr>
           <p:cNvPr id="2" name="Title 1"/>
@@ -5214,8 +4521,8 @@
         </p:nvSpPr>
         <p:spPr>
           <a:xfrm>
-            <a:off x="411479" y="2167128"/>
-            <a:ext cx="4937759" cy="1609344"/>
+            <a:off x="685800" y="960120"/>
+            <a:ext cx="5486400" cy="1463040"/>
           </a:xfrm>
         </p:spPr>
         <p:txBody>
@@ -5232,7 +4539,7 @@
             <a:r>
               <a:rPr sz="2800" b="1" i="0">
                 <a:solidFill>
-                  <a:srgbClr val="FFFFFF"/>
+                  <a:srgbClr val="11394A"/>
                 </a:solidFill>
               </a:rPr>
               <a:t>저장해 두고 필요할 때 꺼내 보세요</a:t>
@@ -5242,14 +4549,14 @@
       </p:sp>
       <p:sp>
         <p:nvSpPr>
-          <p:cNvPr id="8" name="한 줄 문구"/>
+          <p:cNvPr id="4" name="한 줄 문구"/>
           <p:cNvSpPr txBox="1"/>
           <p:nvPr/>
         </p:nvSpPr>
         <p:spPr>
           <a:xfrm>
-            <a:off x="411479" y="4160520"/>
-            <a:ext cx="4800600" cy="822960"/>
+            <a:off x="685800" y="2560320"/>
+            <a:ext cx="5486400" cy="822960"/>
           </a:xfrm>
           <a:prstGeom prst="rect">
             <a:avLst/>
@@ -5280,14 +4587,14 @@
       </p:sp>
       <p:sp>
         <p:nvSpPr>
-          <p:cNvPr id="9" name="안내 문구"/>
+          <p:cNvPr id="5" name="안내 문구"/>
           <p:cNvSpPr txBox="1"/>
           <p:nvPr/>
         </p:nvSpPr>
         <p:spPr>
           <a:xfrm>
-            <a:off x="411479" y="5029200"/>
-            <a:ext cx="4800600" cy="914400"/>
+            <a:off x="685800" y="3429000"/>
+            <a:ext cx="5486400" cy="914400"/>
           </a:xfrm>
           <a:prstGeom prst="rect">
             <a:avLst/>

--- a/public/fun/pack/pptx/news/카드뉴스_18_계절안부_바닷가등대.pptx
+++ b/public/fun/pack/pptx/news/카드뉴스_18_계절안부_바닷가등대.pptx
@@ -3348,7 +3348,7 @@
             <a:r>
               <a:rPr sz="3000" b="1" i="0">
                 <a:solidFill>
-                  <a:srgbClr val="11394A"/>
+                  <a:srgbClr val="11485F"/>
                 </a:solidFill>
               </a:rPr>
               <a:t>장마철 빨래 잘 말리는 법</a:t>
@@ -3386,7 +3386,7 @@
             <a:r>
               <a:rPr sz="1500" b="0" i="1">
                 <a:solidFill>
-                  <a:srgbClr val="11394A"/>
+                  <a:srgbClr val="11485F"/>
                 </a:solidFill>
               </a:rPr>
               <a:t>옆으로 넘겨 보세요 →</a:t>
@@ -3473,7 +3473,7 @@
             <a:avLst/>
           </a:prstGeom>
           <a:solidFill>
-            <a:srgbClr val="25799D"/>
+            <a:srgbClr val="2695C5"/>
           </a:solidFill>
           <a:ln>
             <a:noFill/>
@@ -3555,7 +3555,7 @@
             <a:r>
               <a:rPr sz="6600" b="1" i="0">
                 <a:solidFill>
-                  <a:srgbClr val="25799D"/>
+                  <a:srgbClr val="2695C5"/>
                 </a:solidFill>
               </a:rPr>
               <a:t>01</a:t>
@@ -3680,7 +3680,7 @@
             <a:avLst/>
           </a:prstGeom>
           <a:solidFill>
-            <a:srgbClr val="25799D"/>
+            <a:srgbClr val="2695C5"/>
           </a:solidFill>
           <a:ln>
             <a:noFill/>
@@ -3762,7 +3762,7 @@
             <a:r>
               <a:rPr sz="6600" b="1" i="0">
                 <a:solidFill>
-                  <a:srgbClr val="25799D"/>
+                  <a:srgbClr val="2695C5"/>
                 </a:solidFill>
               </a:rPr>
               <a:t>02</a:t>
@@ -3887,7 +3887,7 @@
             <a:avLst/>
           </a:prstGeom>
           <a:solidFill>
-            <a:srgbClr val="25799D"/>
+            <a:srgbClr val="2695C5"/>
           </a:solidFill>
           <a:ln>
             <a:noFill/>
@@ -3969,7 +3969,7 @@
             <a:r>
               <a:rPr sz="6600" b="1" i="0">
                 <a:solidFill>
-                  <a:srgbClr val="25799D"/>
+                  <a:srgbClr val="2695C5"/>
                 </a:solidFill>
               </a:rPr>
               <a:t>03</a:t>
@@ -4094,7 +4094,7 @@
             <a:avLst/>
           </a:prstGeom>
           <a:solidFill>
-            <a:srgbClr val="25799D"/>
+            <a:srgbClr val="2695C5"/>
           </a:solidFill>
           <a:ln>
             <a:noFill/>
@@ -4176,7 +4176,7 @@
             <a:r>
               <a:rPr sz="6600" b="1" i="0">
                 <a:solidFill>
-                  <a:srgbClr val="25799D"/>
+                  <a:srgbClr val="2695C5"/>
                 </a:solidFill>
               </a:rPr>
               <a:t>04</a:t>
@@ -4301,7 +4301,7 @@
             <a:avLst/>
           </a:prstGeom>
           <a:solidFill>
-            <a:srgbClr val="25799D"/>
+            <a:srgbClr val="2695C5"/>
           </a:solidFill>
           <a:ln>
             <a:noFill/>
@@ -4383,7 +4383,7 @@
             <a:r>
               <a:rPr sz="6600" b="1" i="0">
                 <a:solidFill>
-                  <a:srgbClr val="25799D"/>
+                  <a:srgbClr val="2695C5"/>
                 </a:solidFill>
               </a:rPr>
               <a:t>05</a:t>
@@ -4539,7 +4539,7 @@
             <a:r>
               <a:rPr sz="2800" b="1" i="0">
                 <a:solidFill>
-                  <a:srgbClr val="11394A"/>
+                  <a:srgbClr val="11485F"/>
                 </a:solidFill>
               </a:rPr>
               <a:t>저장해 두고 필요할 때 꺼내 보세요</a:t>
@@ -4577,7 +4577,7 @@
             <a:r>
               <a:rPr sz="1500" b="0" i="1">
                 <a:solidFill>
-                  <a:srgbClr val="11394A"/>
+                  <a:srgbClr val="11485F"/>
                 </a:solidFill>
               </a:rPr>
               <a:t>마음에 들면 공유해 주세요</a:t>
@@ -4642,34 +4642,34 @@
         <a:sysClr val="window" lastClr="FFFFFF"/>
       </a:lt1>
       <a:dk2>
-        <a:srgbClr val="11394A"/>
+        <a:srgbClr val="11485F"/>
       </a:dk2>
       <a:lt2>
-        <a:srgbClr val="EEF7FB"/>
+        <a:srgbClr val="EEF8FC"/>
       </a:lt2>
       <a:accent1>
-        <a:srgbClr val="25799D"/>
+        <a:srgbClr val="2695C5"/>
       </a:accent1>
       <a:accent2>
-        <a:srgbClr val="913B4C"/>
+        <a:srgbClr val="209DB6"/>
       </a:accent2>
       <a:accent3>
-        <a:srgbClr val="11394A"/>
+        <a:srgbClr val="11485F"/>
       </a:accent3>
       <a:accent4>
-        <a:srgbClr val="CCE9F5"/>
+        <a:srgbClr val="D1EEFA"/>
       </a:accent4>
       <a:accent5>
-        <a:srgbClr val="5B5A74"/>
+        <a:srgbClr val="2399BE"/>
       </a:accent5>
       <a:accent6>
-        <a:srgbClr val="708892"/>
+        <a:srgbClr val="70919F"/>
       </a:accent6>
       <a:hlink>
-        <a:srgbClr val="25799D"/>
+        <a:srgbClr val="2695C5"/>
       </a:hlink>
       <a:folHlink>
-        <a:srgbClr val="11394A"/>
+        <a:srgbClr val="11485F"/>
       </a:folHlink>
     </a:clrScheme>
     <a:fontScheme name="Office">
